--- a/outsystems/niveau-1/deel-08/slidedeck.pptx
+++ b/outsystems/niveau-1/deel-08/slidedeck.pptx
@@ -3440,8 +3440,8 @@
         </p:nvSpPr>
         <p:spPr>
           <a:xfrm>
-            <a:off x="640080" y="548640"/>
-            <a:ext cx="10881360" cy="914400"/>
+            <a:off x="640080" y="457200"/>
+            <a:ext cx="10881360" cy="822960"/>
           </a:xfrm>
           <a:prstGeom prst="rect">
             <a:avLst/>
@@ -3633,8 +3633,8 @@
         </p:nvSpPr>
         <p:spPr>
           <a:xfrm>
-            <a:off x="640080" y="548640"/>
-            <a:ext cx="10881360" cy="914400"/>
+            <a:off x="640080" y="457200"/>
+            <a:ext cx="10881360" cy="822960"/>
           </a:xfrm>
           <a:prstGeom prst="rect">
             <a:avLst/>
@@ -3814,8 +3814,8 @@
         </p:nvSpPr>
         <p:spPr>
           <a:xfrm>
-            <a:off x="640080" y="548640"/>
-            <a:ext cx="10881360" cy="914400"/>
+            <a:off x="640080" y="457200"/>
+            <a:ext cx="10881360" cy="822960"/>
           </a:xfrm>
           <a:prstGeom prst="rect">
             <a:avLst/>
@@ -4176,8 +4176,8 @@
         </p:nvSpPr>
         <p:spPr>
           <a:xfrm>
-            <a:off x="640080" y="457200"/>
-            <a:ext cx="10881360" cy="731520"/>
+            <a:off x="640080" y="365760"/>
+            <a:ext cx="10881360" cy="640080"/>
           </a:xfrm>
           <a:prstGeom prst="rect">
             <a:avLst/>
@@ -4192,7 +4192,7 @@
           <a:p>
             <a:pPr algn="l"/>
             <a:r>
-              <a:rPr sz="2600" b="1">
+              <a:rPr sz="2400" b="1">
                 <a:solidFill>
                   <a:srgbClr val="14213D"/>
                 </a:solidFill>
@@ -4212,8 +4212,8 @@
           <p:nvPr/>
         </p:nvGraphicFramePr>
         <p:xfrm>
-          <a:off x="640080" y="1371600"/>
-          <a:ext cx="10881360" cy="2194560"/>
+          <a:off x="640080" y="1097280"/>
+          <a:ext cx="10881360" cy="1828800"/>
         </p:xfrm>
         <a:graphic>
           <a:graphicData uri="http://schemas.openxmlformats.org/drawingml/2006/table">
@@ -4226,7 +4226,7 @@
                 <a:gridCol w="3627120"/>
                 <a:gridCol w="3627120"/>
               </a:tblGrid>
-              <a:tr h="548640">
+              <a:tr h="457200">
                 <a:tc>
                   <a:txBody>
                     <a:bodyPr/>
@@ -4241,7 +4241,7 @@
                     <a:lstStyle/>
                     <a:p>
                       <a:r>
-                        <a:rPr sz="1600" b="1"/>
+                        <a:rPr sz="1400" b="1"/>
                         <a:t>O11</a:t>
                       </a:r>
                     </a:p>
@@ -4254,7 +4254,7 @@
                     <a:lstStyle/>
                     <a:p>
                       <a:r>
-                        <a:rPr sz="1600" b="1"/>
+                        <a:rPr sz="1400" b="1"/>
                         <a:t>ODC</a:t>
                       </a:r>
                     </a:p>
@@ -4262,14 +4262,14 @@
                   <a:tcPr/>
                 </a:tc>
               </a:tr>
-              <a:tr h="548640">
+              <a:tr h="457200">
                 <a:tc>
                   <a:txBody>
                     <a:bodyPr/>
                     <a:lstStyle/>
                     <a:p>
                       <a:r>
-                        <a:rPr sz="1600"/>
+                        <a:rPr sz="1400"/>
                         <a:t>Gebruikersbeheer</a:t>
                       </a:r>
                     </a:p>
@@ -4282,7 +4282,7 @@
                     <a:lstStyle/>
                     <a:p>
                       <a:r>
-                        <a:rPr sz="1600"/>
+                        <a:rPr sz="1400"/>
                         <a:t>Native IT Users, direct in platform</a:t>
                       </a:r>
                     </a:p>
@@ -4295,7 +4295,7 @@
                     <a:lstStyle/>
                     <a:p>
                       <a:r>
-                        <a:rPr sz="1600"/>
+                        <a:rPr sz="1400"/>
                         <a:t>IAM-first, gekoppelde identity provider</a:t>
                       </a:r>
                     </a:p>
@@ -4303,14 +4303,14 @@
                   <a:tcPr/>
                 </a:tc>
               </a:tr>
-              <a:tr h="548640">
+              <a:tr h="457200">
                 <a:tc>
                   <a:txBody>
                     <a:bodyPr/>
                     <a:lstStyle/>
                     <a:p>
                       <a:r>
-                        <a:rPr sz="1600"/>
+                        <a:rPr sz="1400"/>
                         <a:t>Externe IdP</a:t>
                       </a:r>
                     </a:p>
@@ -4323,7 +4323,7 @@
                     <a:lstStyle/>
                     <a:p>
                       <a:r>
-                        <a:rPr sz="1600"/>
+                        <a:rPr sz="1400"/>
                         <a:t>Optioneel, aparte configuratie</a:t>
                       </a:r>
                     </a:p>
@@ -4336,7 +4336,7 @@
                     <a:lstStyle/>
                     <a:p>
                       <a:r>
-                        <a:rPr sz="1600"/>
+                        <a:rPr sz="1400"/>
                         <a:t>Standaarduitgangspunt</a:t>
                       </a:r>
                     </a:p>
@@ -4344,14 +4344,14 @@
                   <a:tcPr/>
                 </a:tc>
               </a:tr>
-              <a:tr h="548640">
+              <a:tr h="457200">
                 <a:tc>
                   <a:txBody>
                     <a:bodyPr/>
                     <a:lstStyle/>
                     <a:p>
                       <a:r>
-                        <a:rPr sz="1600"/>
+                        <a:rPr sz="1400"/>
                         <a:t>Bij Meridiaan</a:t>
                       </a:r>
                     </a:p>
@@ -4364,7 +4364,7 @@
                     <a:lstStyle/>
                     <a:p>
                       <a:r>
-                        <a:rPr sz="1600"/>
+                        <a:rPr sz="1400"/>
                         <a:t>Oudere satellietapps: grotendeels IT Users</a:t>
                       </a:r>
                     </a:p>
@@ -4377,7 +4377,7 @@
                     <a:lstStyle/>
                     <a:p>
                       <a:r>
-                        <a:rPr sz="1600"/>
+                        <a:rPr sz="1400"/>
                         <a:t>Nieuwbouw: IAM-koppeling</a:t>
                       </a:r>
                     </a:p>
@@ -4389,6 +4389,30 @@
           </a:graphicData>
         </a:graphic>
       </p:graphicFrame>
+      <p:pic>
+        <p:nvPicPr>
+          <p:cNvPr id="4" name="Picture 3" descr="figuur-8-1.png"/>
+          <p:cNvPicPr>
+            <a:picLocks noChangeAspect="1"/>
+          </p:cNvPicPr>
+          <p:nvPr/>
+        </p:nvPicPr>
+        <p:blipFill>
+          <a:blip r:embed="rId2"/>
+          <a:stretch>
+            <a:fillRect/>
+          </a:stretch>
+        </p:blipFill>
+        <p:spPr>
+          <a:xfrm>
+            <a:off x="2702560" y="3200400"/>
+            <a:ext cx="6756400" cy="3474720"/>
+          </a:xfrm>
+          <a:prstGeom prst="rect">
+            <a:avLst/>
+          </a:prstGeom>
+        </p:spPr>
+      </p:pic>
     </p:spTree>
   </p:cSld>
   <p:clrMapOvr>
